--- a/presentation/presentation.pptx
+++ b/presentation/presentation.pptx
@@ -3633,16 +3633,12 @@
             <a:br/>
             <a:br/>
             <a:r>
-              <a:rPr>
-                <a:hlinkClick r:id="rId2"/>
-              </a:rPr>
+              <a:rPr/>
               <a:t>Eleanor Roosevelt</a:t>
             </a:r>
             <a:br/>
             <a:r>
-              <a:rPr>
-                <a:hlinkClick r:id="rId3"/>
-              </a:rPr>
+              <a:rPr/>
               <a:t>John Peters Humphrey</a:t>
             </a:r>
           </a:p>
@@ -3668,7 +3664,7 @@
             </a:pPr>
             <a:r>
               <a:rPr/>
-              <a:t>1 January 2023</a:t>
+              <a:t>2023-01-01</a:t>
             </a:r>
           </a:p>
         </p:txBody>
@@ -4041,13 +4037,13 @@
                 <a:solidFill>
                   <a:srgbClr val="06287E"/>
                 </a:solidFill>
-                <a:latin typeface=""/>
+                <a:latin typeface="Courier"/>
               </a:rPr>
               <a:t>ping</a:t>
             </a:r>
             <a:r>
               <a:rPr>
-                <a:latin typeface=""/>
+                <a:latin typeface="Courier"/>
               </a:rPr>
               <a:t> wikipedia.org</a:t>
             </a:r>
